--- a/assets/pptx/catalog-692.pptx
+++ b/assets/pptx/catalog-692.pptx
@@ -3272,7 +3272,7 @@
                 <a:ea typeface="Ebrima"/>
                 <a:cs typeface="Ebrima"/>
               </a:rPr>
-              <a:t>ይስሃቅ መዘግየቱ ለደስታና ለሳቅ ነው (2x)</a:t>
+              <a:t>ይስሃቅ መዘግየቱ ለደስታና ለሳቅ ነው 2x</a:t>
             </a:r>
           </a:p>
         </p:txBody>
@@ -3357,7 +3357,7 @@
                 <a:ea typeface="Ebrima"/>
                 <a:cs typeface="Ebrima"/>
               </a:rPr>
-              <a:t>በቅርብ ይሆናል አየዋለሁ (2x)</a:t>
+              <a:t>በቅርብ ይሆናል አየዋለሁ 2x</a:t>
             </a:r>
           </a:p>
           <a:p>
@@ -3393,7 +3393,7 @@
                 <a:ea typeface="Ebrima"/>
                 <a:cs typeface="Ebrima"/>
               </a:rPr>
-              <a:t>በቅርብ ይሆናል አየዋለሁ (2x)</a:t>
+              <a:t>በቅርብ ይሆናል አየዋለሁ 2x</a:t>
             </a:r>
           </a:p>
           <a:p>
@@ -3429,7 +3429,7 @@
                 <a:ea typeface="Ebrima"/>
                 <a:cs typeface="Ebrima"/>
               </a:rPr>
-              <a:t>በቅርብ ይሆናል አየዋለሁ (2x)</a:t>
+              <a:t>በቅርብ ይሆናል አየዋለሁ 2x</a:t>
             </a:r>
           </a:p>
         </p:txBody>
@@ -3568,7 +3568,7 @@
                 <a:ea typeface="Ebrima"/>
                 <a:cs typeface="Ebrima"/>
               </a:rPr>
-              <a:t>እርሱን ጠርቶት ያፈረ የለም (2x)</a:t>
+              <a:t>እርሱን ጠርቶት ያፈረ የለም 2x</a:t>
             </a:r>
           </a:p>
         </p:txBody>
@@ -3689,7 +3689,7 @@
                 <a:ea typeface="Ebrima"/>
                 <a:cs typeface="Ebrima"/>
               </a:rPr>
-              <a:t>ተዓምር ሊሰራብህ ጌታም ሊከብርብህ ነው (2x)</a:t>
+              <a:t>ተዓምር ሊሰራብህ ጌታም ሊከብርብህ ነው 2x</a:t>
             </a:r>
           </a:p>
         </p:txBody>
@@ -3931,7 +3931,7 @@
                 <a:ea typeface="Ebrima"/>
                 <a:cs typeface="Ebrima"/>
               </a:rPr>
-              <a:t>ከፍ በል በምድር በሠማይ (2x)</a:t>
+              <a:t>ከፍ በል በምድር በሠማይ 2x</a:t>
             </a:r>
           </a:p>
         </p:txBody>
@@ -4173,7 +4173,7 @@
                 <a:ea typeface="Ebrima"/>
                 <a:cs typeface="Ebrima"/>
               </a:rPr>
-              <a:t>ከፍ በል በምድር በሠማይ (2x)</a:t>
+              <a:t>ከፍ በል በምድር በሠማይ 2x</a:t>
             </a:r>
           </a:p>
         </p:txBody>
@@ -4276,7 +4276,7 @@
                 <a:ea typeface="Ebrima"/>
                 <a:cs typeface="Ebrima"/>
               </a:rPr>
-              <a:t>ክብሬን ልጣለው እንጂ ሥምህን ላክብረው ልወድስ (2x)</a:t>
+              <a:t>ክብሬን ልጣለው እንጂ ሥምህን ላክብረው ልወድስ 2x</a:t>
             </a:r>
           </a:p>
           <a:p>
@@ -4608,7 +4608,7 @@
                 <a:ea typeface="Ebrima"/>
                 <a:cs typeface="Ebrima"/>
               </a:rPr>
-              <a:t>ከፍ በል በምድር በሠማይ (2x)</a:t>
+              <a:t>ከፍ በል በምድር በሠማይ 2x</a:t>
             </a:r>
           </a:p>
         </p:txBody>
@@ -4693,7 +4693,7 @@
                 <a:ea typeface="Ebrima"/>
                 <a:cs typeface="Ebrima"/>
               </a:rPr>
-              <a:t>በቅርብ ይሆናል አየዋለሁ (2x)</a:t>
+              <a:t>በቅርብ ይሆናል አየዋለሁ 2x</a:t>
             </a:r>
           </a:p>
           <a:p>
@@ -4729,7 +4729,7 @@
                 <a:ea typeface="Ebrima"/>
                 <a:cs typeface="Ebrima"/>
               </a:rPr>
-              <a:t>በቅርብ ይሆናል አየዋለሁ (2x)</a:t>
+              <a:t>በቅርብ ይሆናል አየዋለሁ 2x</a:t>
             </a:r>
           </a:p>
           <a:p>
@@ -4765,7 +4765,7 @@
                 <a:ea typeface="Ebrima"/>
                 <a:cs typeface="Ebrima"/>
               </a:rPr>
-              <a:t>በቅርብ ይሆናል አየዋለሁ (2x)</a:t>
+              <a:t>በቅርብ ይሆናል አየዋለሁ 2x</a:t>
             </a:r>
           </a:p>
         </p:txBody>
@@ -4904,7 +4904,7 @@
                 <a:ea typeface="Ebrima"/>
                 <a:cs typeface="Ebrima"/>
               </a:rPr>
-              <a:t>እርሱን ጠርቶት ያፈረ የለም (2x)</a:t>
+              <a:t>እርሱን ጠርቶት ያፈረ የለም 2x</a:t>
             </a:r>
           </a:p>
         </p:txBody>
